--- a/projects/sales-customer-intelligence/sales-customer-intelligence.pptx
+++ b/projects/sales-customer-intelligence/sales-customer-intelligence.pptx
@@ -4201,6 +4201,7 @@
       <p:sp>
         <p:nvSpPr>
           <p:cNvPr id="6" name="camelliapramanik.github.io">
+            <ns0:hlinkClick xmlns:ns0="http://schemas.openxmlformats.org/drawingml/2006/main" xmlns:ns1="http://schemas.openxmlformats.org/officeDocument/2006/relationships" ns1:id="R0be77d7cf3054101" tooltip="Open https://camelliapramanik.github.io/"/>
             <a:extLst xmlns:a="http://schemas.openxmlformats.org/drawingml/2006/main">
               <a:ext uri="{FF2B5EF4-FFF2-40B4-BE49-F238E27FC236}">
                 <a16:creationId xmlns:a16="http://schemas.microsoft.com/office/drawing/2014/main" id="{1E5941A2-4132-4384-995A-BEB197448F51}"/>
@@ -8710,6 +8711,7 @@
       <p:sp>
         <p:nvSpPr>
           <p:cNvPr id="8" name="Watch the report walkthrough">
+            <ns0:hlinkClick xmlns:ns0="http://schemas.openxmlformats.org/drawingml/2006/main" xmlns:ns1="http://schemas.openxmlformats.org/officeDocument/2006/relationships" ns1:id="R96983794f7d74dee" tooltip="Open https://camelliapramanik.github.io/#projects"/>
             <a:extLst xmlns:a="http://schemas.openxmlformats.org/drawingml/2006/main">
               <a:ext uri="{FF2B5EF4-FFF2-40B4-BE49-F238E27FC236}">
                 <a16:creationId xmlns:a16="http://schemas.microsoft.com/office/drawing/2014/main" id="{C0822D8D-38BF-4D64-BE3E-10E29B344BBC}"/>
